--- a/D ACT AW - Interference.pptx
+++ b/D ACT AW - Interference.pptx
@@ -221,7 +221,7 @@
           <a:p>
             <a:fld id="{2FC2648E-2733-4EC8-BEDA-1577DE2D3D01}" type="datetimeFigureOut">
               <a:rPr lang="en-US" smtClean="0"/>
-              <a:t>9/4/2026</a:t>
+              <a:t>10/15/2026</a:t>
             </a:fld>
             <a:endParaRPr lang="en-US"/>
           </a:p>
@@ -1242,7 +1242,7 @@
           <a:p>
             <a:fld id="{8CF61943-3342-4554-8403-118C8C1529D5}" type="datetimeFigureOut">
               <a:rPr lang="en-US" smtClean="0"/>
-              <a:t>9/4/2026</a:t>
+              <a:t>10/15/2026</a:t>
             </a:fld>
             <a:endParaRPr lang="en-US"/>
           </a:p>
@@ -1605,7 +1605,7 @@
           <a:p>
             <a:fld id="{8CF61943-3342-4554-8403-118C8C1529D5}" type="datetimeFigureOut">
               <a:rPr lang="en-US" smtClean="0"/>
-              <a:t>9/4/2026</a:t>
+              <a:t>10/15/2026</a:t>
             </a:fld>
             <a:endParaRPr lang="en-US"/>
           </a:p>
@@ -2421,7 +2421,7 @@
             <a:pPr lvl="2"/>
             <a:r>
               <a:rPr lang="en-US" altLang="ja-JP" sz="1200" dirty="0"/>
-              <a:t>The older analog models are the worst</a:t>
+              <a:t>The older analog models are the worst at 2.4Ghz</a:t>
             </a:r>
           </a:p>
           <a:p>
@@ -2602,7 +2602,7 @@
             <a:pPr lvl="1"/>
             <a:r>
               <a:rPr lang="en-US" altLang="ja-JP" sz="1400" dirty="0">
-                <a:hlinkClick r:id=""/>
+                <a:hlinkClick r:id="" action="ppaction://noaction"/>
               </a:rPr>
               <a:t>http://www.spaceweather.com/</a:t>
             </a:r>
@@ -2611,7 +2611,7 @@
             <a:pPr lvl="1"/>
             <a:r>
               <a:rPr lang="en-US" altLang="ja-JP" sz="1400" dirty="0">
-                <a:hlinkClick r:id=""/>
+                <a:hlinkClick r:id="" action="ppaction://noaction"/>
               </a:rPr>
               <a:t>http://www.solarham.net/</a:t>
             </a:r>
@@ -3331,6 +3331,22 @@
 </file>
 
 <file path=customXml/item1.xml><?xml version="1.0" encoding="utf-8"?>
+<p:properties xmlns:p="http://schemas.microsoft.com/office/2006/metadata/properties" xmlns:xsi="http://www.w3.org/2001/XMLSchema-instance" xmlns:pc="http://schemas.microsoft.com/office/infopath/2007/PartnerControls">
+  <documentManagement>
+    <_dlc_DocId xmlns="c7a77415-c4a3-4262-8430-671f3e8707b6">7J4PPY27XH2W-901365475-257158</_dlc_DocId>
+    <_dlc_DocIdUrl xmlns="c7a77415-c4a3-4262-8430-671f3e8707b6">
+      <Url>https://automotivei.sharepoint.com/sites/PMO/_layouts/15/DocIdRedir.aspx?ID=7J4PPY27XH2W-901365475-257158</Url>
+      <Description>7J4PPY27XH2W-901365475-257158</Description>
+    </_dlc_DocIdUrl>
+    <TaxCatchAll xmlns="c7a77415-c4a3-4262-8430-671f3e8707b6" xsi:nil="true"/>
+    <lcf76f155ced4ddcb4097134ff3c332f xmlns="69a7259e-7a2c-42d5-bc84-25eccf0dce8b">
+      <Terms xmlns="http://schemas.microsoft.com/office/infopath/2007/PartnerControls"/>
+    </lcf76f155ced4ddcb4097134ff3c332f>
+  </documentManagement>
+</p:properties>
+</file>
+
+<file path=customXml/item2.xml><?xml version="1.0" encoding="utf-8"?>
 <ct:contentTypeSchema xmlns:ct="http://schemas.microsoft.com/office/2006/metadata/contentType" xmlns:ma="http://schemas.microsoft.com/office/2006/metadata/properties/metaAttributes" ct:_="" ma:_="" ma:contentTypeName="Document" ma:contentTypeID="0x01010067B86F8708159745A0B6896184DE9576" ma:contentTypeVersion="19" ma:contentTypeDescription="Create a new document." ma:contentTypeScope="" ma:versionID="493bf26d373952ea1ae3b9e24cd19b33">
   <xsd:schema xmlns:xsd="http://www.w3.org/2001/XMLSchema" xmlns:xs="http://www.w3.org/2001/XMLSchema" xmlns:p="http://schemas.microsoft.com/office/2006/metadata/properties" xmlns:ns2="c7a77415-c4a3-4262-8430-671f3e8707b6" xmlns:ns3="69a7259e-7a2c-42d5-bc84-25eccf0dce8b" targetNamespace="http://schemas.microsoft.com/office/2006/metadata/properties" ma:root="true" ma:fieldsID="69c00e31f84d56e19bb090b7ea67ab52" ns2:_="" ns3:_="">
     <xsd:import namespace="c7a77415-c4a3-4262-8430-671f3e8707b6"/>
@@ -3616,23 +3632,16 @@
 </ct:contentTypeSchema>
 </file>
 
-<file path=customXml/item2.xml><?xml version="1.0" encoding="utf-8"?>
-<p:properties xmlns:p="http://schemas.microsoft.com/office/2006/metadata/properties" xmlns:xsi="http://www.w3.org/2001/XMLSchema-instance" xmlns:pc="http://schemas.microsoft.com/office/infopath/2007/PartnerControls">
-  <documentManagement>
-    <_dlc_DocId xmlns="c7a77415-c4a3-4262-8430-671f3e8707b6">7J4PPY27XH2W-901365475-257158</_dlc_DocId>
-    <_dlc_DocIdUrl xmlns="c7a77415-c4a3-4262-8430-671f3e8707b6">
-      <Url>https://automotivei.sharepoint.com/sites/PMO/_layouts/15/DocIdRedir.aspx?ID=7J4PPY27XH2W-901365475-257158</Url>
-      <Description>7J4PPY27XH2W-901365475-257158</Description>
-    </_dlc_DocIdUrl>
-    <TaxCatchAll xmlns="c7a77415-c4a3-4262-8430-671f3e8707b6" xsi:nil="true"/>
-    <lcf76f155ced4ddcb4097134ff3c332f xmlns="69a7259e-7a2c-42d5-bc84-25eccf0dce8b">
-      <Terms xmlns="http://schemas.microsoft.com/office/infopath/2007/PartnerControls"/>
-    </lcf76f155ced4ddcb4097134ff3c332f>
-  </documentManagement>
-</p:properties>
+<file path=customXml/item3.xml><?xml version="1.0" encoding="utf-8"?>
+<?mso-contentType ?>
+<FormTemplates xmlns="http://schemas.microsoft.com/sharepoint/v3/contenttype/forms">
+  <Display>DocumentLibraryForm</Display>
+  <Edit>DocumentLibraryForm</Edit>
+  <New>DocumentLibraryForm</New>
+</FormTemplates>
 </file>
 
-<file path=customXml/item3.xml><?xml version="1.0" encoding="utf-8"?>
+<file path=customXml/item4.xml><?xml version="1.0" encoding="utf-8"?>
 <?mso-contentType ?>
 <spe:Receivers xmlns:spe="http://schemas.microsoft.com/sharepoint/events">
   <Receiver>
@@ -3682,16 +3691,18 @@
 </spe:Receivers>
 </file>
 
-<file path=customXml/item4.xml><?xml version="1.0" encoding="utf-8"?>
-<?mso-contentType ?>
-<FormTemplates xmlns="http://schemas.microsoft.com/sharepoint/v3/contenttype/forms">
-  <Display>DocumentLibraryForm</Display>
-  <Edit>DocumentLibraryForm</Edit>
-  <New>DocumentLibraryForm</New>
-</FormTemplates>
+<file path=customXml/itemProps1.xml><?xml version="1.0" encoding="utf-8"?>
+<ds:datastoreItem xmlns:ds="http://schemas.openxmlformats.org/officeDocument/2006/customXml" ds:itemID="{E71A463F-9F4B-47AC-91AA-3962FD8F3CE5}">
+  <ds:schemaRefs>
+    <ds:schemaRef ds:uri="http://schemas.microsoft.com/office/2006/metadata/properties"/>
+    <ds:schemaRef ds:uri="http://schemas.microsoft.com/office/infopath/2007/PartnerControls"/>
+    <ds:schemaRef ds:uri="c7a77415-c4a3-4262-8430-671f3e8707b6"/>
+    <ds:schemaRef ds:uri="69a7259e-7a2c-42d5-bc84-25eccf0dce8b"/>
+  </ds:schemaRefs>
+</ds:datastoreItem>
 </file>
 
-<file path=customXml/itemProps1.xml><?xml version="1.0" encoding="utf-8"?>
+<file path=customXml/itemProps2.xml><?xml version="1.0" encoding="utf-8"?>
 <ds:datastoreItem xmlns:ds="http://schemas.openxmlformats.org/officeDocument/2006/customXml" ds:itemID="{8FEF19B7-7529-453B-A7D5-A8465340F17A}">
   <ds:schemaRefs>
     <ds:schemaRef ds:uri="http://schemas.microsoft.com/office/2006/metadata/contentType"/>
@@ -3710,29 +3721,18 @@
 </ds:datastoreItem>
 </file>
 
-<file path=customXml/itemProps2.xml><?xml version="1.0" encoding="utf-8"?>
-<ds:datastoreItem xmlns:ds="http://schemas.openxmlformats.org/officeDocument/2006/customXml" ds:itemID="{E71A463F-9F4B-47AC-91AA-3962FD8F3CE5}">
+<file path=customXml/itemProps3.xml><?xml version="1.0" encoding="utf-8"?>
+<ds:datastoreItem xmlns:ds="http://schemas.openxmlformats.org/officeDocument/2006/customXml" ds:itemID="{84EE72F3-C956-4A5B-833F-E761B5D8ACD8}">
   <ds:schemaRefs>
-    <ds:schemaRef ds:uri="http://schemas.microsoft.com/office/2006/metadata/properties"/>
-    <ds:schemaRef ds:uri="http://schemas.microsoft.com/office/infopath/2007/PartnerControls"/>
-    <ds:schemaRef ds:uri="c7a77415-c4a3-4262-8430-671f3e8707b6"/>
-    <ds:schemaRef ds:uri="69a7259e-7a2c-42d5-bc84-25eccf0dce8b"/>
+    <ds:schemaRef ds:uri="http://schemas.microsoft.com/sharepoint/v3/contenttype/forms"/>
   </ds:schemaRefs>
 </ds:datastoreItem>
 </file>
 
-<file path=customXml/itemProps3.xml><?xml version="1.0" encoding="utf-8"?>
+<file path=customXml/itemProps4.xml><?xml version="1.0" encoding="utf-8"?>
 <ds:datastoreItem xmlns:ds="http://schemas.openxmlformats.org/officeDocument/2006/customXml" ds:itemID="{54C592EF-85C1-482B-896B-DED434B6FCCC}">
   <ds:schemaRefs>
     <ds:schemaRef ds:uri="http://schemas.microsoft.com/sharepoint/events"/>
   </ds:schemaRefs>
 </ds:datastoreItem>
-</file>
-
-<file path=customXml/itemProps4.xml><?xml version="1.0" encoding="utf-8"?>
-<ds:datastoreItem xmlns:ds="http://schemas.openxmlformats.org/officeDocument/2006/customXml" ds:itemID="{84EE72F3-C956-4A5B-833F-E761B5D8ACD8}">
-  <ds:schemaRefs>
-    <ds:schemaRef ds:uri="http://schemas.microsoft.com/sharepoint/v3/contenttype/forms"/>
-  </ds:schemaRefs>
-</ds:datastoreItem>
 </file>